--- a/Kursdag 3/Dag tre.pptx
+++ b/Kursdag 3/Dag tre.pptx
@@ -25,6 +25,7 @@
     <p:sldId id="281" r:id="rId19"/>
     <p:sldId id="280" r:id="rId20"/>
     <p:sldId id="282" r:id="rId21"/>
+    <p:sldId id="283" r:id="rId22"/>
   </p:sldIdLst>
   <p:sldSz cx="12192000" cy="6858000"/>
   <p:notesSz cx="6858000" cy="9144000"/>
@@ -278,7 +279,7 @@
           <a:p>
             <a:fld id="{B4D588E3-7146-4465-86D4-0FCCB25395CD}" type="datetimeFigureOut">
               <a:rPr lang="nb-NO" smtClean="0"/>
-              <a:t>22.03.2026</a:t>
+              <a:t>23.03.2026</a:t>
             </a:fld>
             <a:endParaRPr lang="nb-NO"/>
           </a:p>
@@ -476,7 +477,7 @@
           <a:p>
             <a:fld id="{B4D588E3-7146-4465-86D4-0FCCB25395CD}" type="datetimeFigureOut">
               <a:rPr lang="nb-NO" smtClean="0"/>
-              <a:t>22.03.2026</a:t>
+              <a:t>23.03.2026</a:t>
             </a:fld>
             <a:endParaRPr lang="nb-NO"/>
           </a:p>
@@ -684,7 +685,7 @@
           <a:p>
             <a:fld id="{B4D588E3-7146-4465-86D4-0FCCB25395CD}" type="datetimeFigureOut">
               <a:rPr lang="nb-NO" smtClean="0"/>
-              <a:t>22.03.2026</a:t>
+              <a:t>23.03.2026</a:t>
             </a:fld>
             <a:endParaRPr lang="nb-NO"/>
           </a:p>
@@ -882,7 +883,7 @@
           <a:p>
             <a:fld id="{B4D588E3-7146-4465-86D4-0FCCB25395CD}" type="datetimeFigureOut">
               <a:rPr lang="nb-NO" smtClean="0"/>
-              <a:t>22.03.2026</a:t>
+              <a:t>23.03.2026</a:t>
             </a:fld>
             <a:endParaRPr lang="nb-NO"/>
           </a:p>
@@ -1157,7 +1158,7 @@
           <a:p>
             <a:fld id="{B4D588E3-7146-4465-86D4-0FCCB25395CD}" type="datetimeFigureOut">
               <a:rPr lang="nb-NO" smtClean="0"/>
-              <a:t>22.03.2026</a:t>
+              <a:t>23.03.2026</a:t>
             </a:fld>
             <a:endParaRPr lang="nb-NO"/>
           </a:p>
@@ -1422,7 +1423,7 @@
           <a:p>
             <a:fld id="{B4D588E3-7146-4465-86D4-0FCCB25395CD}" type="datetimeFigureOut">
               <a:rPr lang="nb-NO" smtClean="0"/>
-              <a:t>22.03.2026</a:t>
+              <a:t>23.03.2026</a:t>
             </a:fld>
             <a:endParaRPr lang="nb-NO"/>
           </a:p>
@@ -1834,7 +1835,7 @@
           <a:p>
             <a:fld id="{B4D588E3-7146-4465-86D4-0FCCB25395CD}" type="datetimeFigureOut">
               <a:rPr lang="nb-NO" smtClean="0"/>
-              <a:t>22.03.2026</a:t>
+              <a:t>23.03.2026</a:t>
             </a:fld>
             <a:endParaRPr lang="nb-NO"/>
           </a:p>
@@ -1975,7 +1976,7 @@
           <a:p>
             <a:fld id="{B4D588E3-7146-4465-86D4-0FCCB25395CD}" type="datetimeFigureOut">
               <a:rPr lang="nb-NO" smtClean="0"/>
-              <a:t>22.03.2026</a:t>
+              <a:t>23.03.2026</a:t>
             </a:fld>
             <a:endParaRPr lang="nb-NO"/>
           </a:p>
@@ -2088,7 +2089,7 @@
           <a:p>
             <a:fld id="{B4D588E3-7146-4465-86D4-0FCCB25395CD}" type="datetimeFigureOut">
               <a:rPr lang="nb-NO" smtClean="0"/>
-              <a:t>22.03.2026</a:t>
+              <a:t>23.03.2026</a:t>
             </a:fld>
             <a:endParaRPr lang="nb-NO"/>
           </a:p>
@@ -2399,7 +2400,7 @@
           <a:p>
             <a:fld id="{B4D588E3-7146-4465-86D4-0FCCB25395CD}" type="datetimeFigureOut">
               <a:rPr lang="nb-NO" smtClean="0"/>
-              <a:t>22.03.2026</a:t>
+              <a:t>23.03.2026</a:t>
             </a:fld>
             <a:endParaRPr lang="nb-NO"/>
           </a:p>
@@ -2687,7 +2688,7 @@
           <a:p>
             <a:fld id="{B4D588E3-7146-4465-86D4-0FCCB25395CD}" type="datetimeFigureOut">
               <a:rPr lang="nb-NO" smtClean="0"/>
-              <a:t>22.03.2026</a:t>
+              <a:t>23.03.2026</a:t>
             </a:fld>
             <a:endParaRPr lang="nb-NO"/>
           </a:p>
@@ -2928,7 +2929,7 @@
           <a:p>
             <a:fld id="{B4D588E3-7146-4465-86D4-0FCCB25395CD}" type="datetimeFigureOut">
               <a:rPr lang="nb-NO" smtClean="0"/>
-              <a:t>22.03.2026</a:t>
+              <a:t>23.03.2026</a:t>
             </a:fld>
             <a:endParaRPr lang="nb-NO"/>
           </a:p>
@@ -3545,7 +3546,7 @@
           <a:p>
             <a:r>
               <a:rPr lang="nb-NO" dirty="0"/>
-              <a:t>TWI – Lese data</a:t>
+              <a:t>TWI – Kommunikasjon</a:t>
             </a:r>
           </a:p>
         </p:txBody>
@@ -3695,7 +3696,7 @@
           <a:p>
             <a:r>
               <a:rPr lang="nb-NO" dirty="0"/>
-              <a:t>TWI – Skrive data</a:t>
+              <a:t>TWI – Kommunikasjon</a:t>
             </a:r>
           </a:p>
         </p:txBody>
@@ -3849,7 +3850,7 @@
           <a:p>
             <a:r>
               <a:rPr lang="nb-NO" dirty="0"/>
-              <a:t>TWI – Lese data</a:t>
+              <a:t>TWI – Kommunikasjon</a:t>
             </a:r>
           </a:p>
         </p:txBody>
@@ -5529,6 +5530,183 @@
 </p:sld>
 </file>
 
+<file path=ppt/slides/slide21.xml><?xml version="1.0" encoding="utf-8"?>
+<p:sld xmlns:a="http://schemas.openxmlformats.org/drawingml/2006/main" xmlns:r="http://schemas.openxmlformats.org/officeDocument/2006/relationships" xmlns:p="http://schemas.openxmlformats.org/presentationml/2006/main">
+  <p:cSld>
+    <p:spTree>
+      <p:nvGrpSpPr>
+        <p:cNvPr id="1" name=""/>
+        <p:cNvGrpSpPr/>
+        <p:nvPr/>
+      </p:nvGrpSpPr>
+      <p:grpSpPr>
+        <a:xfrm>
+          <a:off x="0" y="0"/>
+          <a:ext cx="0" cy="0"/>
+          <a:chOff x="0" y="0"/>
+          <a:chExt cx="0" cy="0"/>
+        </a:xfrm>
+      </p:grpSpPr>
+      <p:sp>
+        <p:nvSpPr>
+          <p:cNvPr id="2" name="Tittel 1">
+            <a:extLst>
+              <a:ext uri="{FF2B5EF4-FFF2-40B4-BE49-F238E27FC236}">
+                <a16:creationId xmlns:a16="http://schemas.microsoft.com/office/drawing/2014/main" id="{DAE6C409-3126-1DC5-6706-DF5B568AA0A4}"/>
+              </a:ext>
+            </a:extLst>
+          </p:cNvPr>
+          <p:cNvSpPr>
+            <a:spLocks noGrp="1"/>
+          </p:cNvSpPr>
+          <p:nvPr>
+            <p:ph type="title"/>
+          </p:nvPr>
+        </p:nvSpPr>
+        <p:spPr/>
+        <p:txBody>
+          <a:bodyPr/>
+          <a:lstStyle/>
+          <a:p>
+            <a:r>
+              <a:rPr lang="nb-NO" dirty="0"/>
+              <a:t>Dagens oppgave</a:t>
+            </a:r>
+          </a:p>
+        </p:txBody>
+      </p:sp>
+      <p:sp>
+        <p:nvSpPr>
+          <p:cNvPr id="3" name="Plassholder for innhold 2">
+            <a:extLst>
+              <a:ext uri="{FF2B5EF4-FFF2-40B4-BE49-F238E27FC236}">
+                <a16:creationId xmlns:a16="http://schemas.microsoft.com/office/drawing/2014/main" id="{F34F40BA-E547-1D8F-EB0B-A93B27DA7085}"/>
+              </a:ext>
+            </a:extLst>
+          </p:cNvPr>
+          <p:cNvSpPr>
+            <a:spLocks noGrp="1"/>
+          </p:cNvSpPr>
+          <p:nvPr>
+            <p:ph idx="1"/>
+          </p:nvPr>
+        </p:nvSpPr>
+        <p:spPr/>
+        <p:txBody>
+          <a:bodyPr/>
+          <a:lstStyle/>
+          <a:p>
+            <a:r>
+              <a:rPr lang="nb-NO" dirty="0"/>
+              <a:t>Litt I</a:t>
+            </a:r>
+            <a:r>
+              <a:rPr lang="nb-NO" baseline="30000" dirty="0"/>
+              <a:t>2</a:t>
+            </a:r>
+            <a:r>
+              <a:rPr lang="nb-NO" dirty="0"/>
+              <a:t>C kommunikasjon</a:t>
+            </a:r>
+          </a:p>
+          <a:p>
+            <a:r>
+              <a:rPr lang="nb-NO" dirty="0"/>
+              <a:t>Bruk av biblioteker</a:t>
+            </a:r>
+          </a:p>
+          <a:p>
+            <a:endParaRPr lang="nb-NO" dirty="0"/>
+          </a:p>
+          <a:p>
+            <a:r>
+              <a:rPr lang="nb-NO" dirty="0"/>
+              <a:t>Legg til I</a:t>
+            </a:r>
+            <a:r>
+              <a:rPr lang="nb-NO" baseline="30000" dirty="0"/>
+              <a:t>2</a:t>
+            </a:r>
+            <a:r>
+              <a:rPr lang="nb-NO" dirty="0"/>
+              <a:t>C-Host komponent</a:t>
+            </a:r>
+          </a:p>
+          <a:p>
+            <a:pPr lvl="1"/>
+            <a:r>
+              <a:rPr lang="nb-NO" dirty="0"/>
+              <a:t>Endre navn til I2C-Host</a:t>
+            </a:r>
+          </a:p>
+          <a:p>
+            <a:pPr lvl="1"/>
+            <a:r>
+              <a:rPr lang="nb-NO" dirty="0"/>
+              <a:t>Pass på at Host </a:t>
+            </a:r>
+            <a:r>
+              <a:rPr lang="nb-NO" dirty="0" err="1"/>
+              <a:t>lib</a:t>
+            </a:r>
+            <a:r>
+              <a:rPr lang="nb-NO" dirty="0"/>
+              <a:t> er TWI0</a:t>
+            </a:r>
+          </a:p>
+          <a:p>
+            <a:pPr lvl="1"/>
+            <a:r>
+              <a:rPr lang="nb-NO" dirty="0"/>
+              <a:t>Skru på </a:t>
+            </a:r>
+            <a:r>
+              <a:rPr lang="nb-NO" dirty="0" err="1"/>
+              <a:t>Interrupt</a:t>
+            </a:r>
+            <a:r>
+              <a:rPr lang="nb-NO" dirty="0"/>
+              <a:t> Driven, </a:t>
+            </a:r>
+            <a:r>
+              <a:rPr lang="nb-NO" dirty="0" err="1"/>
+              <a:t>interrupts</a:t>
+            </a:r>
+            <a:r>
+              <a:rPr lang="nb-NO" dirty="0"/>
+              <a:t> for Read og Write og globale </a:t>
+            </a:r>
+            <a:r>
+              <a:rPr lang="nb-NO" dirty="0" err="1"/>
+              <a:t>interrupts</a:t>
+            </a:r>
+            <a:endParaRPr lang="nb-NO" dirty="0"/>
+          </a:p>
+          <a:p>
+            <a:pPr lvl="1"/>
+            <a:endParaRPr lang="nb-NO" dirty="0"/>
+          </a:p>
+          <a:p>
+            <a:r>
+              <a:rPr lang="nb-NO" dirty="0"/>
+              <a:t>Vis status på knapper om dere har tid</a:t>
+            </a:r>
+          </a:p>
+        </p:txBody>
+      </p:sp>
+    </p:spTree>
+    <p:extLst>
+      <p:ext uri="{BB962C8B-B14F-4D97-AF65-F5344CB8AC3E}">
+        <p14:creationId xmlns:p14="http://schemas.microsoft.com/office/powerpoint/2010/main" val="1254857896"/>
+      </p:ext>
+    </p:extLst>
+  </p:cSld>
+  <p:clrMapOvr>
+    <a:masterClrMapping/>
+  </p:clrMapOvr>
+</p:sld>
+</file>
+
 <file path=ppt/slides/slide3.xml><?xml version="1.0" encoding="utf-8"?>
 <p:sld xmlns:a="http://schemas.openxmlformats.org/drawingml/2006/main" xmlns:r="http://schemas.openxmlformats.org/officeDocument/2006/relationships" xmlns:p="http://schemas.openxmlformats.org/presentationml/2006/main">
   <p:cSld>
@@ -5875,7 +6053,7 @@
           <a:p>
             <a:r>
               <a:rPr lang="nb-NO" dirty="0"/>
-              <a:t>TWI – Lese data</a:t>
+              <a:t>TWI – Kommunikasjon</a:t>
             </a:r>
           </a:p>
         </p:txBody>
@@ -6025,7 +6203,7 @@
           <a:p>
             <a:r>
               <a:rPr lang="nb-NO" dirty="0"/>
-              <a:t>TWI – Lese data</a:t>
+              <a:t>TWI – Kommunikasjon</a:t>
             </a:r>
           </a:p>
         </p:txBody>
@@ -6175,7 +6353,7 @@
           <a:p>
             <a:r>
               <a:rPr lang="nb-NO" dirty="0"/>
-              <a:t>TWI – Lese data</a:t>
+              <a:t>TWI – Kommunikasjon</a:t>
             </a:r>
           </a:p>
         </p:txBody>
@@ -6325,7 +6503,7 @@
           <a:p>
             <a:r>
               <a:rPr lang="nb-NO" dirty="0"/>
-              <a:t>TWI – Skrive data</a:t>
+              <a:t>TWI – Kommunikasjon</a:t>
             </a:r>
           </a:p>
         </p:txBody>
@@ -6479,7 +6657,7 @@
           <a:p>
             <a:r>
               <a:rPr lang="nb-NO" dirty="0"/>
-              <a:t>TWI – Lese data</a:t>
+              <a:t>TWI – Kommunikasjon</a:t>
             </a:r>
           </a:p>
         </p:txBody>

--- a/Kursdag 3/Dag tre.pptx
+++ b/Kursdag 3/Dag tre.pptx
@@ -5593,7 +5593,9 @@
         </p:nvSpPr>
         <p:spPr/>
         <p:txBody>
-          <a:bodyPr/>
+          <a:bodyPr>
+            <a:normAutofit/>
+          </a:bodyPr>
           <a:lstStyle/>
           <a:p>
             <a:r>
@@ -5636,7 +5638,7 @@
             <a:pPr lvl="1"/>
             <a:r>
               <a:rPr lang="nb-NO" dirty="0"/>
-              <a:t>Endre navn til I2C-Host</a:t>
+              <a:t>Endre navn fra I2C0_Host til I2C_Host</a:t>
             </a:r>
           </a:p>
           <a:p>
